--- a/thesis/presentations/chapter05_defence.pptx
+++ b/thesis/presentations/chapter05_defence.pptx
@@ -8463,7 +8463,7 @@
                 </a:solidFill>
                 <a:latin typeface="Cambria"/>
               </a:rPr>
-              <a:t>The published sensitivity is measured on the training set.</a:t>
+              <a:t>The published sensitivity was measured on the training set.</a:t>
             </a:r>
           </a:p>
         </p:txBody>
@@ -8797,7 +8797,7 @@
                 </a:solidFill>
                 <a:latin typeface="Calibri"/>
               </a:rPr>
-              <a:t>The registry keeps the second script's number and the first script's label. All 47 deployed entries still read sensitivity_basis: held_out_actives_by_scaffold.</a:t>
+              <a:t>The registry kept the second script's number and the first script's label, on all 47 deployed entries. Repaired at the source on 2026-08-30, commit ab88039.</a:t>
             </a:r>
           </a:p>
         </p:txBody>
@@ -9149,7 +9149,7 @@
                 </a:solidFill>
                 <a:latin typeface="Calibri"/>
               </a:rPr>
-              <a:t>as published</a:t>
+              <a:t>before the fix</a:t>
             </a:r>
           </a:p>
         </p:txBody>
@@ -9188,7 +9188,7 @@
                 </a:solidFill>
                 <a:latin typeface="Calibri"/>
               </a:rPr>
-              <a:t>held out only</a:t>
+              <a:t>as published now</a:t>
             </a:r>
           </a:p>
         </p:txBody>
